--- a/docs/pptx/auc3/ritu-auc3-linsubhr-ratio-anemia3.pptx
+++ b/docs/pptx/auc3/ritu-auc3-linsubhr-ratio-anemia3.pptx
@@ -2443,7 +2443,7 @@
           </p:nvSpPr>
           <p:spPr>
             <a:xfrm>
-              <a:off x="1463479" y="2073503"/>
+              <a:off x="1464298" y="2073503"/>
               <a:ext cx="0" cy="3649639"/>
             </a:xfrm>
             <a:custGeom>
@@ -2486,7 +2486,7 @@
           </p:nvSpPr>
           <p:spPr>
             <a:xfrm>
-              <a:off x="3267849" y="2073503"/>
+              <a:off x="3268188" y="2073503"/>
               <a:ext cx="0" cy="3649639"/>
             </a:xfrm>
             <a:custGeom>
@@ -2529,7 +2529,7 @@
           </p:nvSpPr>
           <p:spPr>
             <a:xfrm>
-              <a:off x="5072218" y="2073503"/>
+              <a:off x="5072078" y="2073503"/>
               <a:ext cx="0" cy="3649639"/>
             </a:xfrm>
             <a:custGeom>
@@ -2572,7 +2572,7 @@
           </p:nvSpPr>
           <p:spPr>
             <a:xfrm>
-              <a:off x="6876587" y="2073503"/>
+              <a:off x="6875967" y="2073503"/>
               <a:ext cx="0" cy="3649639"/>
             </a:xfrm>
             <a:custGeom>
@@ -2830,7 +2830,7 @@
           </p:nvSpPr>
           <p:spPr>
             <a:xfrm>
-              <a:off x="2365664" y="2073503"/>
+              <a:off x="2366243" y="2073503"/>
               <a:ext cx="0" cy="3649639"/>
             </a:xfrm>
             <a:custGeom>
@@ -2873,7 +2873,7 @@
           </p:nvSpPr>
           <p:spPr>
             <a:xfrm>
-              <a:off x="4170033" y="2073503"/>
+              <a:off x="4170133" y="2073503"/>
               <a:ext cx="0" cy="3649639"/>
             </a:xfrm>
             <a:custGeom>
@@ -2916,7 +2916,7 @@
           </p:nvSpPr>
           <p:spPr>
             <a:xfrm>
-              <a:off x="5974402" y="2073503"/>
+              <a:off x="5974022" y="2073503"/>
               <a:ext cx="0" cy="3649639"/>
             </a:xfrm>
             <a:custGeom>
@@ -2959,7 +2959,7 @@
           </p:nvSpPr>
           <p:spPr>
             <a:xfrm>
-              <a:off x="7778772" y="2073503"/>
+              <a:off x="7777912" y="2073503"/>
               <a:ext cx="0" cy="3649639"/>
             </a:xfrm>
             <a:custGeom>
@@ -3003,524 +3003,521 @@
           <p:spPr>
             <a:xfrm>
               <a:off x="1172049" y="2073503"/>
-              <a:ext cx="7090630" cy="3482897"/>
+              <a:ext cx="7090630" cy="3483004"/>
             </a:xfrm>
             <a:custGeom>
               <a:avLst/>
               <a:pathLst>
-                <a:path w="7090630" h="3482897">
+                <a:path w="7090630" h="3483004">
                   <a:moveTo>
-                    <a:pt x="2139058" y="0"/>
+                    <a:pt x="2162020" y="0"/>
                   </a:moveTo>
                   <a:lnTo>
-                    <a:pt x="2148675" y="58798"/>
-                  </a:lnTo>
-                  <a:lnTo>
-                    <a:pt x="2220298" y="447040"/>
-                  </a:lnTo>
-                  <a:lnTo>
-                    <a:pt x="2291920" y="791272"/>
-                  </a:lnTo>
-                  <a:lnTo>
-                    <a:pt x="2363543" y="1096483"/>
-                  </a:lnTo>
-                  <a:lnTo>
-                    <a:pt x="2435165" y="1367096"/>
-                  </a:lnTo>
-                  <a:lnTo>
-                    <a:pt x="2506788" y="1607033"/>
-                  </a:lnTo>
-                  <a:lnTo>
-                    <a:pt x="2578410" y="1819771"/>
-                  </a:lnTo>
-                  <a:lnTo>
-                    <a:pt x="2650033" y="2008395"/>
-                  </a:lnTo>
-                  <a:lnTo>
-                    <a:pt x="2721655" y="2175636"/>
-                  </a:lnTo>
-                  <a:lnTo>
-                    <a:pt x="2793278" y="2323920"/>
-                  </a:lnTo>
-                  <a:lnTo>
-                    <a:pt x="2864901" y="2455394"/>
-                  </a:lnTo>
-                  <a:lnTo>
-                    <a:pt x="2936523" y="2571965"/>
-                  </a:lnTo>
-                  <a:lnTo>
-                    <a:pt x="3008146" y="2658536"/>
-                  </a:lnTo>
-                  <a:lnTo>
-                    <a:pt x="3079768" y="2678162"/>
-                  </a:lnTo>
-                  <a:lnTo>
-                    <a:pt x="3151391" y="2697322"/>
-                  </a:lnTo>
-                  <a:lnTo>
-                    <a:pt x="3223013" y="2716026"/>
-                  </a:lnTo>
-                  <a:lnTo>
-                    <a:pt x="3294636" y="2734285"/>
-                  </a:lnTo>
-                  <a:lnTo>
-                    <a:pt x="3366258" y="2752110"/>
-                  </a:lnTo>
-                  <a:lnTo>
-                    <a:pt x="3437881" y="2769511"/>
-                  </a:lnTo>
-                  <a:lnTo>
-                    <a:pt x="3509503" y="2786499"/>
-                  </a:lnTo>
-                  <a:lnTo>
-                    <a:pt x="3581126" y="2803082"/>
-                  </a:lnTo>
-                  <a:lnTo>
-                    <a:pt x="3652748" y="2819271"/>
-                  </a:lnTo>
-                  <a:lnTo>
-                    <a:pt x="3724371" y="2835074"/>
-                  </a:lnTo>
-                  <a:lnTo>
-                    <a:pt x="3795993" y="2850502"/>
-                  </a:lnTo>
-                  <a:lnTo>
-                    <a:pt x="3867616" y="2865563"/>
-                  </a:lnTo>
-                  <a:lnTo>
-                    <a:pt x="3939238" y="2880266"/>
-                  </a:lnTo>
-                  <a:lnTo>
-                    <a:pt x="4010861" y="2894619"/>
-                  </a:lnTo>
-                  <a:lnTo>
-                    <a:pt x="4082483" y="2908631"/>
-                  </a:lnTo>
-                  <a:lnTo>
-                    <a:pt x="4154106" y="2922309"/>
-                  </a:lnTo>
-                  <a:lnTo>
-                    <a:pt x="4225729" y="2935662"/>
-                  </a:lnTo>
-                  <a:lnTo>
-                    <a:pt x="4297351" y="2948698"/>
-                  </a:lnTo>
-                  <a:lnTo>
-                    <a:pt x="4368974" y="2961423"/>
-                  </a:lnTo>
-                  <a:lnTo>
-                    <a:pt x="4440596" y="2973846"/>
-                  </a:lnTo>
-                  <a:lnTo>
-                    <a:pt x="4512219" y="2985973"/>
-                  </a:lnTo>
-                  <a:lnTo>
-                    <a:pt x="4583841" y="2997812"/>
-                  </a:lnTo>
-                  <a:lnTo>
-                    <a:pt x="4655464" y="3009370"/>
-                  </a:lnTo>
-                  <a:lnTo>
-                    <a:pt x="4727086" y="3020652"/>
-                  </a:lnTo>
-                  <a:lnTo>
-                    <a:pt x="4798709" y="3031666"/>
-                  </a:lnTo>
-                  <a:lnTo>
-                    <a:pt x="4870331" y="3042418"/>
-                  </a:lnTo>
-                  <a:lnTo>
-                    <a:pt x="4941954" y="3052915"/>
-                  </a:lnTo>
-                  <a:lnTo>
-                    <a:pt x="5013576" y="3063162"/>
-                  </a:lnTo>
-                  <a:lnTo>
-                    <a:pt x="5085199" y="3073165"/>
-                  </a:lnTo>
-                  <a:lnTo>
-                    <a:pt x="5156821" y="3082930"/>
-                  </a:lnTo>
-                  <a:lnTo>
-                    <a:pt x="5228444" y="3092463"/>
-                  </a:lnTo>
-                  <a:lnTo>
-                    <a:pt x="5300066" y="3101769"/>
-                  </a:lnTo>
-                  <a:lnTo>
-                    <a:pt x="5371689" y="3110854"/>
-                  </a:lnTo>
-                  <a:lnTo>
-                    <a:pt x="5443311" y="3119723"/>
-                  </a:lnTo>
-                  <a:lnTo>
-                    <a:pt x="5514934" y="3128380"/>
-                  </a:lnTo>
-                  <a:lnTo>
-                    <a:pt x="5586557" y="3136832"/>
-                  </a:lnTo>
-                  <a:lnTo>
-                    <a:pt x="5658179" y="3145083"/>
-                  </a:lnTo>
-                  <a:lnTo>
-                    <a:pt x="5729802" y="3153138"/>
-                  </a:lnTo>
-                  <a:lnTo>
-                    <a:pt x="5801424" y="3161001"/>
-                  </a:lnTo>
-                  <a:lnTo>
-                    <a:pt x="5873047" y="3168677"/>
-                  </a:lnTo>
-                  <a:lnTo>
-                    <a:pt x="5944669" y="3176171"/>
-                  </a:lnTo>
-                  <a:lnTo>
-                    <a:pt x="6016292" y="3183486"/>
-                  </a:lnTo>
-                  <a:lnTo>
-                    <a:pt x="6087914" y="3190627"/>
-                  </a:lnTo>
-                  <a:lnTo>
-                    <a:pt x="6159537" y="3197599"/>
-                  </a:lnTo>
-                  <a:lnTo>
-                    <a:pt x="6231159" y="3204405"/>
-                  </a:lnTo>
-                  <a:lnTo>
-                    <a:pt x="6302782" y="3211048"/>
-                  </a:lnTo>
-                  <a:lnTo>
-                    <a:pt x="6374404" y="3217534"/>
-                  </a:lnTo>
-                  <a:lnTo>
-                    <a:pt x="6446027" y="3223866"/>
-                  </a:lnTo>
-                  <a:lnTo>
-                    <a:pt x="6517649" y="3230047"/>
-                  </a:lnTo>
-                  <a:lnTo>
-                    <a:pt x="6589272" y="3236081"/>
-                  </a:lnTo>
-                  <a:lnTo>
-                    <a:pt x="6660894" y="3241971"/>
-                  </a:lnTo>
-                  <a:lnTo>
-                    <a:pt x="6732517" y="3247721"/>
-                  </a:lnTo>
-                  <a:lnTo>
-                    <a:pt x="6804139" y="3253335"/>
-                  </a:lnTo>
-                  <a:lnTo>
-                    <a:pt x="6875762" y="3258815"/>
-                  </a:lnTo>
-                  <a:lnTo>
-                    <a:pt x="6947385" y="3264165"/>
-                  </a:lnTo>
-                  <a:lnTo>
-                    <a:pt x="7019007" y="3269387"/>
-                  </a:lnTo>
-                  <a:lnTo>
-                    <a:pt x="7090630" y="3274485"/>
-                  </a:lnTo>
-                  <a:lnTo>
-                    <a:pt x="7090630" y="3482897"/>
-                  </a:lnTo>
-                  <a:lnTo>
-                    <a:pt x="7019007" y="3482788"/>
-                  </a:lnTo>
-                  <a:lnTo>
-                    <a:pt x="6947385" y="3482665"/>
-                  </a:lnTo>
-                  <a:lnTo>
-                    <a:pt x="6875762" y="3482527"/>
-                  </a:lnTo>
-                  <a:lnTo>
-                    <a:pt x="6804139" y="3482371"/>
-                  </a:lnTo>
-                  <a:lnTo>
-                    <a:pt x="6732517" y="3482196"/>
-                  </a:lnTo>
-                  <a:lnTo>
-                    <a:pt x="6660894" y="3481997"/>
-                  </a:lnTo>
-                  <a:lnTo>
-                    <a:pt x="6589272" y="3481774"/>
-                  </a:lnTo>
-                  <a:lnTo>
-                    <a:pt x="6517649" y="3481521"/>
-                  </a:lnTo>
-                  <a:lnTo>
-                    <a:pt x="6446027" y="3481237"/>
-                  </a:lnTo>
-                  <a:lnTo>
-                    <a:pt x="6374404" y="3480916"/>
-                  </a:lnTo>
-                  <a:lnTo>
-                    <a:pt x="6302782" y="3480554"/>
-                  </a:lnTo>
-                  <a:lnTo>
-                    <a:pt x="6231159" y="3480146"/>
-                  </a:lnTo>
-                  <a:lnTo>
-                    <a:pt x="6159537" y="3479686"/>
-                  </a:lnTo>
-                  <a:lnTo>
-                    <a:pt x="6087914" y="3479167"/>
-                  </a:lnTo>
-                  <a:lnTo>
-                    <a:pt x="6016292" y="3478581"/>
-                  </a:lnTo>
-                  <a:lnTo>
-                    <a:pt x="5944669" y="3477921"/>
-                  </a:lnTo>
-                  <a:lnTo>
-                    <a:pt x="5873047" y="3477176"/>
-                  </a:lnTo>
-                  <a:lnTo>
-                    <a:pt x="5801424" y="3476336"/>
-                  </a:lnTo>
-                  <a:lnTo>
-                    <a:pt x="5729802" y="3475389"/>
-                  </a:lnTo>
-                  <a:lnTo>
-                    <a:pt x="5658179" y="3474320"/>
-                  </a:lnTo>
-                  <a:lnTo>
-                    <a:pt x="5586557" y="3473115"/>
-                  </a:lnTo>
-                  <a:lnTo>
-                    <a:pt x="5514934" y="3471756"/>
-                  </a:lnTo>
-                  <a:lnTo>
-                    <a:pt x="5443311" y="3470223"/>
-                  </a:lnTo>
-                  <a:lnTo>
-                    <a:pt x="5371689" y="3468494"/>
-                  </a:lnTo>
-                  <a:lnTo>
-                    <a:pt x="5300066" y="3466544"/>
-                  </a:lnTo>
-                  <a:lnTo>
-                    <a:pt x="5228444" y="3464344"/>
-                  </a:lnTo>
-                  <a:lnTo>
-                    <a:pt x="5156821" y="3461864"/>
-                  </a:lnTo>
-                  <a:lnTo>
-                    <a:pt x="5085199" y="3459066"/>
-                  </a:lnTo>
-                  <a:lnTo>
-                    <a:pt x="5013576" y="3455910"/>
-                  </a:lnTo>
-                  <a:lnTo>
-                    <a:pt x="4941954" y="3452352"/>
-                  </a:lnTo>
-                  <a:lnTo>
-                    <a:pt x="4870331" y="3448338"/>
-                  </a:lnTo>
-                  <a:lnTo>
-                    <a:pt x="4798709" y="3443811"/>
-                  </a:lnTo>
-                  <a:lnTo>
-                    <a:pt x="4727086" y="3438705"/>
-                  </a:lnTo>
-                  <a:lnTo>
-                    <a:pt x="4655464" y="3432947"/>
-                  </a:lnTo>
-                  <a:lnTo>
-                    <a:pt x="4583841" y="3426452"/>
-                  </a:lnTo>
-                  <a:lnTo>
-                    <a:pt x="4512219" y="3419127"/>
-                  </a:lnTo>
-                  <a:lnTo>
-                    <a:pt x="4440596" y="3410865"/>
-                  </a:lnTo>
-                  <a:lnTo>
-                    <a:pt x="4368974" y="3401547"/>
-                  </a:lnTo>
-                  <a:lnTo>
-                    <a:pt x="4297351" y="3391038"/>
-                  </a:lnTo>
-                  <a:lnTo>
-                    <a:pt x="4225729" y="3379186"/>
-                  </a:lnTo>
-                  <a:lnTo>
-                    <a:pt x="4154106" y="3365818"/>
-                  </a:lnTo>
-                  <a:lnTo>
-                    <a:pt x="4082483" y="3350740"/>
-                  </a:lnTo>
-                  <a:lnTo>
-                    <a:pt x="4010861" y="3333736"/>
-                  </a:lnTo>
-                  <a:lnTo>
-                    <a:pt x="3939238" y="3314557"/>
-                  </a:lnTo>
-                  <a:lnTo>
-                    <a:pt x="3867616" y="3292926"/>
-                  </a:lnTo>
-                  <a:lnTo>
-                    <a:pt x="3795993" y="3268530"/>
-                  </a:lnTo>
-                  <a:lnTo>
-                    <a:pt x="3724371" y="3241014"/>
-                  </a:lnTo>
-                  <a:lnTo>
-                    <a:pt x="3652748" y="3209981"/>
-                  </a:lnTo>
-                  <a:lnTo>
-                    <a:pt x="3581126" y="3174980"/>
-                  </a:lnTo>
-                  <a:lnTo>
-                    <a:pt x="3509503" y="3135504"/>
-                  </a:lnTo>
-                  <a:lnTo>
-                    <a:pt x="3437881" y="3090982"/>
-                  </a:lnTo>
-                  <a:lnTo>
-                    <a:pt x="3366258" y="3040767"/>
-                  </a:lnTo>
-                  <a:lnTo>
-                    <a:pt x="3294636" y="2984132"/>
-                  </a:lnTo>
-                  <a:lnTo>
-                    <a:pt x="3223013" y="2920257"/>
-                  </a:lnTo>
-                  <a:lnTo>
-                    <a:pt x="3151391" y="2848215"/>
-                  </a:lnTo>
-                  <a:lnTo>
-                    <a:pt x="3079768" y="2766962"/>
-                  </a:lnTo>
-                  <a:lnTo>
-                    <a:pt x="3008146" y="2675322"/>
-                  </a:lnTo>
-                  <a:lnTo>
-                    <a:pt x="2936523" y="2638431"/>
-                  </a:lnTo>
-                  <a:lnTo>
-                    <a:pt x="2864901" y="2617836"/>
-                  </a:lnTo>
-                  <a:lnTo>
-                    <a:pt x="2793278" y="2596740"/>
-                  </a:lnTo>
-                  <a:lnTo>
-                    <a:pt x="2721655" y="2575129"/>
-                  </a:lnTo>
-                  <a:lnTo>
-                    <a:pt x="2650033" y="2552993"/>
-                  </a:lnTo>
-                  <a:lnTo>
-                    <a:pt x="2578410" y="2530316"/>
-                  </a:lnTo>
-                  <a:lnTo>
-                    <a:pt x="2506788" y="2507088"/>
-                  </a:lnTo>
-                  <a:lnTo>
-                    <a:pt x="2435165" y="2483293"/>
-                  </a:lnTo>
-                  <a:lnTo>
-                    <a:pt x="2363543" y="2458919"/>
-                  </a:lnTo>
-                  <a:lnTo>
-                    <a:pt x="2291920" y="2433951"/>
-                  </a:lnTo>
-                  <a:lnTo>
-                    <a:pt x="2220298" y="2408374"/>
-                  </a:lnTo>
-                  <a:lnTo>
-                    <a:pt x="2148675" y="2382175"/>
-                  </a:lnTo>
-                  <a:lnTo>
-                    <a:pt x="2077053" y="2355337"/>
-                  </a:lnTo>
-                  <a:lnTo>
-                    <a:pt x="2005430" y="2327845"/>
-                  </a:lnTo>
-                  <a:lnTo>
-                    <a:pt x="1933808" y="2299684"/>
-                  </a:lnTo>
-                  <a:lnTo>
-                    <a:pt x="1862185" y="2270836"/>
-                  </a:lnTo>
-                  <a:lnTo>
-                    <a:pt x="1790563" y="2241286"/>
-                  </a:lnTo>
-                  <a:lnTo>
-                    <a:pt x="1718940" y="2211016"/>
-                  </a:lnTo>
-                  <a:lnTo>
-                    <a:pt x="1647318" y="2180008"/>
-                  </a:lnTo>
-                  <a:lnTo>
-                    <a:pt x="1575695" y="2148245"/>
-                  </a:lnTo>
-                  <a:lnTo>
-                    <a:pt x="1504073" y="2115708"/>
-                  </a:lnTo>
-                  <a:lnTo>
-                    <a:pt x="1432450" y="2082378"/>
-                  </a:lnTo>
-                  <a:lnTo>
-                    <a:pt x="1360827" y="2048236"/>
-                  </a:lnTo>
-                  <a:lnTo>
-                    <a:pt x="1289205" y="2013262"/>
-                  </a:lnTo>
-                  <a:lnTo>
-                    <a:pt x="1217582" y="1977436"/>
-                  </a:lnTo>
-                  <a:lnTo>
-                    <a:pt x="1145960" y="1940738"/>
-                  </a:lnTo>
-                  <a:lnTo>
-                    <a:pt x="1074337" y="1903145"/>
-                  </a:lnTo>
-                  <a:lnTo>
-                    <a:pt x="1002715" y="1864637"/>
-                  </a:lnTo>
-                  <a:lnTo>
-                    <a:pt x="931092" y="1825190"/>
-                  </a:lnTo>
-                  <a:lnTo>
-                    <a:pt x="859470" y="1784782"/>
-                  </a:lnTo>
-                  <a:lnTo>
-                    <a:pt x="787847" y="1743390"/>
-                  </a:lnTo>
-                  <a:lnTo>
-                    <a:pt x="716225" y="1700989"/>
-                  </a:lnTo>
-                  <a:lnTo>
-                    <a:pt x="644602" y="1657556"/>
-                  </a:lnTo>
-                  <a:lnTo>
-                    <a:pt x="572980" y="1613064"/>
-                  </a:lnTo>
-                  <a:lnTo>
-                    <a:pt x="501357" y="1567488"/>
-                  </a:lnTo>
-                  <a:lnTo>
-                    <a:pt x="429735" y="1520802"/>
-                  </a:lnTo>
-                  <a:lnTo>
-                    <a:pt x="358112" y="1472978"/>
-                  </a:lnTo>
-                  <a:lnTo>
-                    <a:pt x="286490" y="1423989"/>
-                  </a:lnTo>
-                  <a:lnTo>
-                    <a:pt x="214867" y="1373807"/>
-                  </a:lnTo>
-                  <a:lnTo>
-                    <a:pt x="143245" y="1322402"/>
-                  </a:lnTo>
-                  <a:lnTo>
-                    <a:pt x="71622" y="1269745"/>
-                  </a:lnTo>
-                  <a:lnTo>
-                    <a:pt x="0" y="1215804"/>
+                    <a:pt x="2220298" y="334877"/>
+                  </a:lnTo>
+                  <a:lnTo>
+                    <a:pt x="2291920" y="698863"/>
+                  </a:lnTo>
+                  <a:lnTo>
+                    <a:pt x="2363543" y="1020775"/>
+                  </a:lnTo>
+                  <a:lnTo>
+                    <a:pt x="2435165" y="1305476"/>
+                  </a:lnTo>
+                  <a:lnTo>
+                    <a:pt x="2506788" y="1557268"/>
+                  </a:lnTo>
+                  <a:lnTo>
+                    <a:pt x="2578410" y="1779954"/>
+                  </a:lnTo>
+                  <a:lnTo>
+                    <a:pt x="2650033" y="1976900"/>
+                  </a:lnTo>
+                  <a:lnTo>
+                    <a:pt x="2721655" y="2151080"/>
+                  </a:lnTo>
+                  <a:lnTo>
+                    <a:pt x="2793278" y="2305126"/>
+                  </a:lnTo>
+                  <a:lnTo>
+                    <a:pt x="2864901" y="2441366"/>
+                  </a:lnTo>
+                  <a:lnTo>
+                    <a:pt x="2936523" y="2561858"/>
+                  </a:lnTo>
+                  <a:lnTo>
+                    <a:pt x="3008146" y="2657116"/>
+                  </a:lnTo>
+                  <a:lnTo>
+                    <a:pt x="3079768" y="2677077"/>
+                  </a:lnTo>
+                  <a:lnTo>
+                    <a:pt x="3151391" y="2696556"/>
+                  </a:lnTo>
+                  <a:lnTo>
+                    <a:pt x="3223013" y="2715564"/>
+                  </a:lnTo>
+                  <a:lnTo>
+                    <a:pt x="3294636" y="2734114"/>
+                  </a:lnTo>
+                  <a:lnTo>
+                    <a:pt x="3366258" y="2752216"/>
+                  </a:lnTo>
+                  <a:lnTo>
+                    <a:pt x="3437881" y="2769880"/>
+                  </a:lnTo>
+                  <a:lnTo>
+                    <a:pt x="3509503" y="2787118"/>
+                  </a:lnTo>
+                  <a:lnTo>
+                    <a:pt x="3581126" y="2803940"/>
+                  </a:lnTo>
+                  <a:lnTo>
+                    <a:pt x="3652748" y="2820356"/>
+                  </a:lnTo>
+                  <a:lnTo>
+                    <a:pt x="3724371" y="2836375"/>
+                  </a:lnTo>
+                  <a:lnTo>
+                    <a:pt x="3795993" y="2852007"/>
+                  </a:lnTo>
+                  <a:lnTo>
+                    <a:pt x="3867616" y="2867262"/>
+                  </a:lnTo>
+                  <a:lnTo>
+                    <a:pt x="3939238" y="2882149"/>
+                  </a:lnTo>
+                  <a:lnTo>
+                    <a:pt x="4010861" y="2896676"/>
+                  </a:lnTo>
+                  <a:lnTo>
+                    <a:pt x="4082483" y="2910852"/>
+                  </a:lnTo>
+                  <a:lnTo>
+                    <a:pt x="4154106" y="2924686"/>
+                  </a:lnTo>
+                  <a:lnTo>
+                    <a:pt x="4225729" y="2938186"/>
+                  </a:lnTo>
+                  <a:lnTo>
+                    <a:pt x="4297351" y="2951360"/>
+                  </a:lnTo>
+                  <a:lnTo>
+                    <a:pt x="4368974" y="2964215"/>
+                  </a:lnTo>
+                  <a:lnTo>
+                    <a:pt x="4440596" y="2976761"/>
+                  </a:lnTo>
+                  <a:lnTo>
+                    <a:pt x="4512219" y="2989003"/>
+                  </a:lnTo>
+                  <a:lnTo>
+                    <a:pt x="4583841" y="3000950"/>
+                  </a:lnTo>
+                  <a:lnTo>
+                    <a:pt x="4655464" y="3012608"/>
+                  </a:lnTo>
+                  <a:lnTo>
+                    <a:pt x="4727086" y="3023985"/>
+                  </a:lnTo>
+                  <a:lnTo>
+                    <a:pt x="4798709" y="3035087"/>
+                  </a:lnTo>
+                  <a:lnTo>
+                    <a:pt x="4870331" y="3045921"/>
+                  </a:lnTo>
+                  <a:lnTo>
+                    <a:pt x="4941954" y="3056493"/>
+                  </a:lnTo>
+                  <a:lnTo>
+                    <a:pt x="5013576" y="3066810"/>
+                  </a:lnTo>
+                  <a:lnTo>
+                    <a:pt x="5085199" y="3076878"/>
+                  </a:lnTo>
+                  <a:lnTo>
+                    <a:pt x="5156821" y="3086703"/>
+                  </a:lnTo>
+                  <a:lnTo>
+                    <a:pt x="5228444" y="3096291"/>
+                  </a:lnTo>
+                  <a:lnTo>
+                    <a:pt x="5300066" y="3105647"/>
+                  </a:lnTo>
+                  <a:lnTo>
+                    <a:pt x="5371689" y="3114777"/>
+                  </a:lnTo>
+                  <a:lnTo>
+                    <a:pt x="5443311" y="3123687"/>
+                  </a:lnTo>
+                  <a:lnTo>
+                    <a:pt x="5514934" y="3132381"/>
+                  </a:lnTo>
+                  <a:lnTo>
+                    <a:pt x="5586557" y="3140866"/>
+                  </a:lnTo>
+                  <a:lnTo>
+                    <a:pt x="5658179" y="3149145"/>
+                  </a:lnTo>
+                  <a:lnTo>
+                    <a:pt x="5729802" y="3157225"/>
+                  </a:lnTo>
+                  <a:lnTo>
+                    <a:pt x="5801424" y="3165110"/>
+                  </a:lnTo>
+                  <a:lnTo>
+                    <a:pt x="5873047" y="3172804"/>
+                  </a:lnTo>
+                  <a:lnTo>
+                    <a:pt x="5944669" y="3180313"/>
+                  </a:lnTo>
+                  <a:lnTo>
+                    <a:pt x="6016292" y="3187640"/>
+                  </a:lnTo>
+                  <a:lnTo>
+                    <a:pt x="6087914" y="3194790"/>
+                  </a:lnTo>
+                  <a:lnTo>
+                    <a:pt x="6159537" y="3201768"/>
+                  </a:lnTo>
+                  <a:lnTo>
+                    <a:pt x="6231159" y="3208577"/>
+                  </a:lnTo>
+                  <a:lnTo>
+                    <a:pt x="6302782" y="3215221"/>
+                  </a:lnTo>
+                  <a:lnTo>
+                    <a:pt x="6374404" y="3221705"/>
+                  </a:lnTo>
+                  <a:lnTo>
+                    <a:pt x="6446027" y="3228033"/>
+                  </a:lnTo>
+                  <a:lnTo>
+                    <a:pt x="6517649" y="3234208"/>
+                  </a:lnTo>
+                  <a:lnTo>
+                    <a:pt x="6589272" y="3240234"/>
+                  </a:lnTo>
+                  <a:lnTo>
+                    <a:pt x="6660894" y="3246114"/>
+                  </a:lnTo>
+                  <a:lnTo>
+                    <a:pt x="6732517" y="3251852"/>
+                  </a:lnTo>
+                  <a:lnTo>
+                    <a:pt x="6804139" y="3257452"/>
+                  </a:lnTo>
+                  <a:lnTo>
+                    <a:pt x="6875762" y="3262916"/>
+                  </a:lnTo>
+                  <a:lnTo>
+                    <a:pt x="6947385" y="3268249"/>
+                  </a:lnTo>
+                  <a:lnTo>
+                    <a:pt x="7019007" y="3273452"/>
+                  </a:lnTo>
+                  <a:lnTo>
+                    <a:pt x="7090630" y="3278530"/>
+                  </a:lnTo>
+                  <a:lnTo>
+                    <a:pt x="7090630" y="3483004"/>
+                  </a:lnTo>
+                  <a:lnTo>
+                    <a:pt x="7019007" y="3482907"/>
+                  </a:lnTo>
+                  <a:lnTo>
+                    <a:pt x="6947385" y="3482798"/>
+                  </a:lnTo>
+                  <a:lnTo>
+                    <a:pt x="6875762" y="3482674"/>
+                  </a:lnTo>
+                  <a:lnTo>
+                    <a:pt x="6804139" y="3482533"/>
+                  </a:lnTo>
+                  <a:lnTo>
+                    <a:pt x="6732517" y="3482375"/>
+                  </a:lnTo>
+                  <a:lnTo>
+                    <a:pt x="6660894" y="3482195"/>
+                  </a:lnTo>
+                  <a:lnTo>
+                    <a:pt x="6589272" y="3481993"/>
+                  </a:lnTo>
+                  <a:lnTo>
+                    <a:pt x="6517649" y="3481764"/>
+                  </a:lnTo>
+                  <a:lnTo>
+                    <a:pt x="6446027" y="3481504"/>
+                  </a:lnTo>
+                  <a:lnTo>
+                    <a:pt x="6374404" y="3481211"/>
+                  </a:lnTo>
+                  <a:lnTo>
+                    <a:pt x="6302782" y="3480880"/>
+                  </a:lnTo>
+                  <a:lnTo>
+                    <a:pt x="6231159" y="3480505"/>
+                  </a:lnTo>
+                  <a:lnTo>
+                    <a:pt x="6159537" y="3480082"/>
+                  </a:lnTo>
+                  <a:lnTo>
+                    <a:pt x="6087914" y="3479603"/>
+                  </a:lnTo>
+                  <a:lnTo>
+                    <a:pt x="6016292" y="3479061"/>
+                  </a:lnTo>
+                  <a:lnTo>
+                    <a:pt x="5944669" y="3478449"/>
+                  </a:lnTo>
+                  <a:lnTo>
+                    <a:pt x="5873047" y="3477756"/>
+                  </a:lnTo>
+                  <a:lnTo>
+                    <a:pt x="5801424" y="3476974"/>
+                  </a:lnTo>
+                  <a:lnTo>
+                    <a:pt x="5729802" y="3476088"/>
+                  </a:lnTo>
+                  <a:lnTo>
+                    <a:pt x="5658179" y="3475087"/>
+                  </a:lnTo>
+                  <a:lnTo>
+                    <a:pt x="5586557" y="3473956"/>
+                  </a:lnTo>
+                  <a:lnTo>
+                    <a:pt x="5514934" y="3472676"/>
+                  </a:lnTo>
+                  <a:lnTo>
+                    <a:pt x="5443311" y="3471229"/>
+                  </a:lnTo>
+                  <a:lnTo>
+                    <a:pt x="5371689" y="3469593"/>
+                  </a:lnTo>
+                  <a:lnTo>
+                    <a:pt x="5300066" y="3467743"/>
+                  </a:lnTo>
+                  <a:lnTo>
+                    <a:pt x="5228444" y="3465652"/>
+                  </a:lnTo>
+                  <a:lnTo>
+                    <a:pt x="5156821" y="3463287"/>
+                  </a:lnTo>
+                  <a:lnTo>
+                    <a:pt x="5085199" y="3460612"/>
+                  </a:lnTo>
+                  <a:lnTo>
+                    <a:pt x="5013576" y="3457589"/>
+                  </a:lnTo>
+                  <a:lnTo>
+                    <a:pt x="4941954" y="3454170"/>
+                  </a:lnTo>
+                  <a:lnTo>
+                    <a:pt x="4870331" y="3450304"/>
+                  </a:lnTo>
+                  <a:lnTo>
+                    <a:pt x="4798709" y="3445933"/>
+                  </a:lnTo>
+                  <a:lnTo>
+                    <a:pt x="4727086" y="3440991"/>
+                  </a:lnTo>
+                  <a:lnTo>
+                    <a:pt x="4655464" y="3435403"/>
+                  </a:lnTo>
+                  <a:lnTo>
+                    <a:pt x="4583841" y="3429085"/>
+                  </a:lnTo>
+                  <a:lnTo>
+                    <a:pt x="4512219" y="3421940"/>
+                  </a:lnTo>
+                  <a:lnTo>
+                    <a:pt x="4440596" y="3413862"/>
+                  </a:lnTo>
+                  <a:lnTo>
+                    <a:pt x="4368974" y="3404728"/>
+                  </a:lnTo>
+                  <a:lnTo>
+                    <a:pt x="4297351" y="3394401"/>
+                  </a:lnTo>
+                  <a:lnTo>
+                    <a:pt x="4225729" y="3382723"/>
+                  </a:lnTo>
+                  <a:lnTo>
+                    <a:pt x="4154106" y="3369519"/>
+                  </a:lnTo>
+                  <a:lnTo>
+                    <a:pt x="4082483" y="3354590"/>
+                  </a:lnTo>
+                  <a:lnTo>
+                    <a:pt x="4010861" y="3337709"/>
+                  </a:lnTo>
+                  <a:lnTo>
+                    <a:pt x="3939238" y="3318622"/>
+                  </a:lnTo>
+                  <a:lnTo>
+                    <a:pt x="3867616" y="3297040"/>
+                  </a:lnTo>
+                  <a:lnTo>
+                    <a:pt x="3795993" y="3272637"/>
+                  </a:lnTo>
+                  <a:lnTo>
+                    <a:pt x="3724371" y="3245045"/>
+                  </a:lnTo>
+                  <a:lnTo>
+                    <a:pt x="3652748" y="3213847"/>
+                  </a:lnTo>
+                  <a:lnTo>
+                    <a:pt x="3581126" y="3178571"/>
+                  </a:lnTo>
+                  <a:lnTo>
+                    <a:pt x="3509503" y="3138684"/>
+                  </a:lnTo>
+                  <a:lnTo>
+                    <a:pt x="3437881" y="3093584"/>
+                  </a:lnTo>
+                  <a:lnTo>
+                    <a:pt x="3366258" y="3042590"/>
+                  </a:lnTo>
+                  <a:lnTo>
+                    <a:pt x="3294636" y="2984930"/>
+                  </a:lnTo>
+                  <a:lnTo>
+                    <a:pt x="3223013" y="2919735"/>
+                  </a:lnTo>
+                  <a:lnTo>
+                    <a:pt x="3151391" y="2846018"/>
+                  </a:lnTo>
+                  <a:lnTo>
+                    <a:pt x="3079768" y="2762667"/>
+                  </a:lnTo>
+                  <a:lnTo>
+                    <a:pt x="3008146" y="2668421"/>
+                  </a:lnTo>
+                  <a:lnTo>
+                    <a:pt x="2936523" y="2636661"/>
+                  </a:lnTo>
+                  <a:lnTo>
+                    <a:pt x="2864901" y="2615700"/>
+                  </a:lnTo>
+                  <a:lnTo>
+                    <a:pt x="2793278" y="2594220"/>
+                  </a:lnTo>
+                  <a:lnTo>
+                    <a:pt x="2721655" y="2572209"/>
+                  </a:lnTo>
+                  <a:lnTo>
+                    <a:pt x="2650033" y="2549653"/>
+                  </a:lnTo>
+                  <a:lnTo>
+                    <a:pt x="2578410" y="2526538"/>
+                  </a:lnTo>
+                  <a:lnTo>
+                    <a:pt x="2506788" y="2502852"/>
+                  </a:lnTo>
+                  <a:lnTo>
+                    <a:pt x="2435165" y="2478580"/>
+                  </a:lnTo>
+                  <a:lnTo>
+                    <a:pt x="2363543" y="2453707"/>
+                  </a:lnTo>
+                  <a:lnTo>
+                    <a:pt x="2291920" y="2428219"/>
+                  </a:lnTo>
+                  <a:lnTo>
+                    <a:pt x="2220298" y="2402100"/>
+                  </a:lnTo>
+                  <a:lnTo>
+                    <a:pt x="2148675" y="2375335"/>
+                  </a:lnTo>
+                  <a:lnTo>
+                    <a:pt x="2077053" y="2347907"/>
+                  </a:lnTo>
+                  <a:lnTo>
+                    <a:pt x="2005430" y="2319801"/>
+                  </a:lnTo>
+                  <a:lnTo>
+                    <a:pt x="1933808" y="2290999"/>
+                  </a:lnTo>
+                  <a:lnTo>
+                    <a:pt x="1862185" y="2261485"/>
+                  </a:lnTo>
+                  <a:lnTo>
+                    <a:pt x="1790563" y="2231240"/>
+                  </a:lnTo>
+                  <a:lnTo>
+                    <a:pt x="1718940" y="2200246"/>
+                  </a:lnTo>
+                  <a:lnTo>
+                    <a:pt x="1647318" y="2168486"/>
+                  </a:lnTo>
+                  <a:lnTo>
+                    <a:pt x="1575695" y="2135940"/>
+                  </a:lnTo>
+                  <a:lnTo>
+                    <a:pt x="1504073" y="2102589"/>
+                  </a:lnTo>
+                  <a:lnTo>
+                    <a:pt x="1432450" y="2068412"/>
+                  </a:lnTo>
+                  <a:lnTo>
+                    <a:pt x="1360827" y="2033390"/>
+                  </a:lnTo>
+                  <a:lnTo>
+                    <a:pt x="1289205" y="1997501"/>
+                  </a:lnTo>
+                  <a:lnTo>
+                    <a:pt x="1217582" y="1960724"/>
+                  </a:lnTo>
+                  <a:lnTo>
+                    <a:pt x="1145960" y="1923036"/>
+                  </a:lnTo>
+                  <a:lnTo>
+                    <a:pt x="1074337" y="1884417"/>
+                  </a:lnTo>
+                  <a:lnTo>
+                    <a:pt x="1002715" y="1844841"/>
+                  </a:lnTo>
+                  <a:lnTo>
+                    <a:pt x="931092" y="1804287"/>
+                  </a:lnTo>
+                  <a:lnTo>
+                    <a:pt x="859470" y="1762729"/>
+                  </a:lnTo>
+                  <a:lnTo>
+                    <a:pt x="787847" y="1720142"/>
+                  </a:lnTo>
+                  <a:lnTo>
+                    <a:pt x="716225" y="1676502"/>
+                  </a:lnTo>
+                  <a:lnTo>
+                    <a:pt x="644602" y="1631781"/>
+                  </a:lnTo>
+                  <a:lnTo>
+                    <a:pt x="572980" y="1585955"/>
+                  </a:lnTo>
+                  <a:lnTo>
+                    <a:pt x="501357" y="1538994"/>
+                  </a:lnTo>
+                  <a:lnTo>
+                    <a:pt x="429735" y="1490871"/>
+                  </a:lnTo>
+                  <a:lnTo>
+                    <a:pt x="358112" y="1441557"/>
+                  </a:lnTo>
+                  <a:lnTo>
+                    <a:pt x="286490" y="1391023"/>
+                  </a:lnTo>
+                  <a:lnTo>
+                    <a:pt x="214867" y="1339239"/>
+                  </a:lnTo>
+                  <a:lnTo>
+                    <a:pt x="143245" y="1286173"/>
+                  </a:lnTo>
+                  <a:lnTo>
+                    <a:pt x="71622" y="1231794"/>
+                  </a:lnTo>
+                  <a:lnTo>
+                    <a:pt x="0" y="1176070"/>
                   </a:lnTo>
                   <a:lnTo>
                     <a:pt x="0" y="0"/>
@@ -3549,225 +3546,222 @@
           </p:nvSpPr>
           <p:spPr>
             <a:xfrm>
-              <a:off x="3311107" y="2073503"/>
-              <a:ext cx="4951571" cy="3274485"/>
+              <a:off x="3334069" y="2073503"/>
+              <a:ext cx="4928609" cy="3278530"/>
             </a:xfrm>
             <a:custGeom>
               <a:avLst/>
               <a:pathLst>
-                <a:path w="4951571" h="3274485">
+                <a:path w="4928609" h="3278530">
                   <a:moveTo>
                     <a:pt x="0" y="0"/>
                   </a:moveTo>
                   <a:lnTo>
-                    <a:pt x="9617" y="58798"/>
-                  </a:lnTo>
-                  <a:lnTo>
-                    <a:pt x="81240" y="447040"/>
-                  </a:lnTo>
-                  <a:lnTo>
-                    <a:pt x="152862" y="791272"/>
-                  </a:lnTo>
-                  <a:lnTo>
-                    <a:pt x="224485" y="1096483"/>
-                  </a:lnTo>
-                  <a:lnTo>
-                    <a:pt x="296107" y="1367096"/>
-                  </a:lnTo>
-                  <a:lnTo>
-                    <a:pt x="367730" y="1607033"/>
-                  </a:lnTo>
-                  <a:lnTo>
-                    <a:pt x="439352" y="1819771"/>
-                  </a:lnTo>
-                  <a:lnTo>
-                    <a:pt x="510975" y="2008395"/>
-                  </a:lnTo>
-                  <a:lnTo>
-                    <a:pt x="582597" y="2175636"/>
-                  </a:lnTo>
-                  <a:lnTo>
-                    <a:pt x="654220" y="2323920"/>
-                  </a:lnTo>
-                  <a:lnTo>
-                    <a:pt x="725842" y="2455394"/>
-                  </a:lnTo>
-                  <a:lnTo>
-                    <a:pt x="797465" y="2571965"/>
-                  </a:lnTo>
-                  <a:lnTo>
-                    <a:pt x="869087" y="2658536"/>
-                  </a:lnTo>
-                  <a:lnTo>
-                    <a:pt x="940710" y="2678162"/>
-                  </a:lnTo>
-                  <a:lnTo>
-                    <a:pt x="1012332" y="2697322"/>
-                  </a:lnTo>
-                  <a:lnTo>
-                    <a:pt x="1083955" y="2716026"/>
-                  </a:lnTo>
-                  <a:lnTo>
-                    <a:pt x="1155577" y="2734285"/>
-                  </a:lnTo>
-                  <a:lnTo>
-                    <a:pt x="1227200" y="2752110"/>
-                  </a:lnTo>
-                  <a:lnTo>
-                    <a:pt x="1298822" y="2769511"/>
-                  </a:lnTo>
-                  <a:lnTo>
-                    <a:pt x="1370445" y="2786499"/>
-                  </a:lnTo>
-                  <a:lnTo>
-                    <a:pt x="1442067" y="2803082"/>
-                  </a:lnTo>
-                  <a:lnTo>
-                    <a:pt x="1513690" y="2819271"/>
-                  </a:lnTo>
-                  <a:lnTo>
-                    <a:pt x="1585313" y="2835074"/>
-                  </a:lnTo>
-                  <a:lnTo>
-                    <a:pt x="1656935" y="2850502"/>
-                  </a:lnTo>
-                  <a:lnTo>
-                    <a:pt x="1728558" y="2865563"/>
-                  </a:lnTo>
-                  <a:lnTo>
-                    <a:pt x="1800180" y="2880266"/>
-                  </a:lnTo>
-                  <a:lnTo>
-                    <a:pt x="1871803" y="2894619"/>
-                  </a:lnTo>
-                  <a:lnTo>
-                    <a:pt x="1943425" y="2908631"/>
-                  </a:lnTo>
-                  <a:lnTo>
-                    <a:pt x="2015048" y="2922309"/>
-                  </a:lnTo>
-                  <a:lnTo>
-                    <a:pt x="2086670" y="2935662"/>
-                  </a:lnTo>
-                  <a:lnTo>
-                    <a:pt x="2158293" y="2948698"/>
-                  </a:lnTo>
-                  <a:lnTo>
-                    <a:pt x="2229915" y="2961423"/>
-                  </a:lnTo>
-                  <a:lnTo>
-                    <a:pt x="2301538" y="2973846"/>
-                  </a:lnTo>
-                  <a:lnTo>
-                    <a:pt x="2373160" y="2985973"/>
-                  </a:lnTo>
-                  <a:lnTo>
-                    <a:pt x="2444783" y="2997812"/>
-                  </a:lnTo>
-                  <a:lnTo>
-                    <a:pt x="2516405" y="3009370"/>
-                  </a:lnTo>
-                  <a:lnTo>
-                    <a:pt x="2588028" y="3020652"/>
-                  </a:lnTo>
-                  <a:lnTo>
-                    <a:pt x="2659650" y="3031666"/>
-                  </a:lnTo>
-                  <a:lnTo>
-                    <a:pt x="2731273" y="3042418"/>
-                  </a:lnTo>
-                  <a:lnTo>
-                    <a:pt x="2802895" y="3052915"/>
-                  </a:lnTo>
-                  <a:lnTo>
-                    <a:pt x="2874518" y="3063162"/>
-                  </a:lnTo>
-                  <a:lnTo>
-                    <a:pt x="2946141" y="3073165"/>
-                  </a:lnTo>
-                  <a:lnTo>
-                    <a:pt x="3017763" y="3082930"/>
-                  </a:lnTo>
-                  <a:lnTo>
-                    <a:pt x="3089386" y="3092463"/>
-                  </a:lnTo>
-                  <a:lnTo>
-                    <a:pt x="3161008" y="3101769"/>
-                  </a:lnTo>
-                  <a:lnTo>
-                    <a:pt x="3232631" y="3110854"/>
-                  </a:lnTo>
-                  <a:lnTo>
-                    <a:pt x="3304253" y="3119723"/>
-                  </a:lnTo>
-                  <a:lnTo>
-                    <a:pt x="3375876" y="3128380"/>
-                  </a:lnTo>
-                  <a:lnTo>
-                    <a:pt x="3447498" y="3136832"/>
-                  </a:lnTo>
-                  <a:lnTo>
-                    <a:pt x="3519121" y="3145083"/>
-                  </a:lnTo>
-                  <a:lnTo>
-                    <a:pt x="3590743" y="3153138"/>
-                  </a:lnTo>
-                  <a:lnTo>
-                    <a:pt x="3662366" y="3161001"/>
-                  </a:lnTo>
-                  <a:lnTo>
-                    <a:pt x="3733988" y="3168677"/>
-                  </a:lnTo>
-                  <a:lnTo>
-                    <a:pt x="3805611" y="3176171"/>
-                  </a:lnTo>
-                  <a:lnTo>
-                    <a:pt x="3877233" y="3183486"/>
-                  </a:lnTo>
-                  <a:lnTo>
-                    <a:pt x="3948856" y="3190627"/>
-                  </a:lnTo>
-                  <a:lnTo>
-                    <a:pt x="4020478" y="3197599"/>
-                  </a:lnTo>
-                  <a:lnTo>
-                    <a:pt x="4092101" y="3204405"/>
-                  </a:lnTo>
-                  <a:lnTo>
-                    <a:pt x="4163723" y="3211048"/>
-                  </a:lnTo>
-                  <a:lnTo>
-                    <a:pt x="4235346" y="3217534"/>
-                  </a:lnTo>
-                  <a:lnTo>
-                    <a:pt x="4306969" y="3223866"/>
-                  </a:lnTo>
-                  <a:lnTo>
-                    <a:pt x="4378591" y="3230047"/>
-                  </a:lnTo>
-                  <a:lnTo>
-                    <a:pt x="4450214" y="3236081"/>
-                  </a:lnTo>
-                  <a:lnTo>
-                    <a:pt x="4521836" y="3241971"/>
-                  </a:lnTo>
-                  <a:lnTo>
-                    <a:pt x="4593459" y="3247721"/>
-                  </a:lnTo>
-                  <a:lnTo>
-                    <a:pt x="4665081" y="3253335"/>
-                  </a:lnTo>
-                  <a:lnTo>
-                    <a:pt x="4736704" y="3258815"/>
-                  </a:lnTo>
-                  <a:lnTo>
-                    <a:pt x="4808326" y="3264165"/>
-                  </a:lnTo>
-                  <a:lnTo>
-                    <a:pt x="4879949" y="3269387"/>
-                  </a:lnTo>
-                  <a:lnTo>
-                    <a:pt x="4951571" y="3274485"/>
+                    <a:pt x="58277" y="334877"/>
+                  </a:lnTo>
+                  <a:lnTo>
+                    <a:pt x="129900" y="698863"/>
+                  </a:lnTo>
+                  <a:lnTo>
+                    <a:pt x="201522" y="1020775"/>
+                  </a:lnTo>
+                  <a:lnTo>
+                    <a:pt x="273145" y="1305476"/>
+                  </a:lnTo>
+                  <a:lnTo>
+                    <a:pt x="344767" y="1557268"/>
+                  </a:lnTo>
+                  <a:lnTo>
+                    <a:pt x="416390" y="1779954"/>
+                  </a:lnTo>
+                  <a:lnTo>
+                    <a:pt x="488012" y="1976900"/>
+                  </a:lnTo>
+                  <a:lnTo>
+                    <a:pt x="559635" y="2151080"/>
+                  </a:lnTo>
+                  <a:lnTo>
+                    <a:pt x="631258" y="2305126"/>
+                  </a:lnTo>
+                  <a:lnTo>
+                    <a:pt x="702880" y="2441366"/>
+                  </a:lnTo>
+                  <a:lnTo>
+                    <a:pt x="774503" y="2561858"/>
+                  </a:lnTo>
+                  <a:lnTo>
+                    <a:pt x="846125" y="2657116"/>
+                  </a:lnTo>
+                  <a:lnTo>
+                    <a:pt x="917748" y="2677077"/>
+                  </a:lnTo>
+                  <a:lnTo>
+                    <a:pt x="989370" y="2696556"/>
+                  </a:lnTo>
+                  <a:lnTo>
+                    <a:pt x="1060993" y="2715564"/>
+                  </a:lnTo>
+                  <a:lnTo>
+                    <a:pt x="1132615" y="2734114"/>
+                  </a:lnTo>
+                  <a:lnTo>
+                    <a:pt x="1204238" y="2752216"/>
+                  </a:lnTo>
+                  <a:lnTo>
+                    <a:pt x="1275860" y="2769880"/>
+                  </a:lnTo>
+                  <a:lnTo>
+                    <a:pt x="1347483" y="2787118"/>
+                  </a:lnTo>
+                  <a:lnTo>
+                    <a:pt x="1419105" y="2803940"/>
+                  </a:lnTo>
+                  <a:lnTo>
+                    <a:pt x="1490728" y="2820356"/>
+                  </a:lnTo>
+                  <a:lnTo>
+                    <a:pt x="1562350" y="2836375"/>
+                  </a:lnTo>
+                  <a:lnTo>
+                    <a:pt x="1633973" y="2852007"/>
+                  </a:lnTo>
+                  <a:lnTo>
+                    <a:pt x="1705595" y="2867262"/>
+                  </a:lnTo>
+                  <a:lnTo>
+                    <a:pt x="1777218" y="2882149"/>
+                  </a:lnTo>
+                  <a:lnTo>
+                    <a:pt x="1848840" y="2896676"/>
+                  </a:lnTo>
+                  <a:lnTo>
+                    <a:pt x="1920463" y="2910852"/>
+                  </a:lnTo>
+                  <a:lnTo>
+                    <a:pt x="1992086" y="2924686"/>
+                  </a:lnTo>
+                  <a:lnTo>
+                    <a:pt x="2063708" y="2938186"/>
+                  </a:lnTo>
+                  <a:lnTo>
+                    <a:pt x="2135331" y="2951360"/>
+                  </a:lnTo>
+                  <a:lnTo>
+                    <a:pt x="2206953" y="2964215"/>
+                  </a:lnTo>
+                  <a:lnTo>
+                    <a:pt x="2278576" y="2976761"/>
+                  </a:lnTo>
+                  <a:lnTo>
+                    <a:pt x="2350198" y="2989003"/>
+                  </a:lnTo>
+                  <a:lnTo>
+                    <a:pt x="2421821" y="3000950"/>
+                  </a:lnTo>
+                  <a:lnTo>
+                    <a:pt x="2493443" y="3012608"/>
+                  </a:lnTo>
+                  <a:lnTo>
+                    <a:pt x="2565066" y="3023985"/>
+                  </a:lnTo>
+                  <a:lnTo>
+                    <a:pt x="2636688" y="3035087"/>
+                  </a:lnTo>
+                  <a:lnTo>
+                    <a:pt x="2708311" y="3045921"/>
+                  </a:lnTo>
+                  <a:lnTo>
+                    <a:pt x="2779933" y="3056493"/>
+                  </a:lnTo>
+                  <a:lnTo>
+                    <a:pt x="2851556" y="3066810"/>
+                  </a:lnTo>
+                  <a:lnTo>
+                    <a:pt x="2923178" y="3076878"/>
+                  </a:lnTo>
+                  <a:lnTo>
+                    <a:pt x="2994801" y="3086703"/>
+                  </a:lnTo>
+                  <a:lnTo>
+                    <a:pt x="3066423" y="3096291"/>
+                  </a:lnTo>
+                  <a:lnTo>
+                    <a:pt x="3138046" y="3105647"/>
+                  </a:lnTo>
+                  <a:lnTo>
+                    <a:pt x="3209668" y="3114777"/>
+                  </a:lnTo>
+                  <a:lnTo>
+                    <a:pt x="3281291" y="3123687"/>
+                  </a:lnTo>
+                  <a:lnTo>
+                    <a:pt x="3352914" y="3132381"/>
+                  </a:lnTo>
+                  <a:lnTo>
+                    <a:pt x="3424536" y="3140866"/>
+                  </a:lnTo>
+                  <a:lnTo>
+                    <a:pt x="3496159" y="3149145"/>
+                  </a:lnTo>
+                  <a:lnTo>
+                    <a:pt x="3567781" y="3157225"/>
+                  </a:lnTo>
+                  <a:lnTo>
+                    <a:pt x="3639404" y="3165110"/>
+                  </a:lnTo>
+                  <a:lnTo>
+                    <a:pt x="3711026" y="3172804"/>
+                  </a:lnTo>
+                  <a:lnTo>
+                    <a:pt x="3782649" y="3180313"/>
+                  </a:lnTo>
+                  <a:lnTo>
+                    <a:pt x="3854271" y="3187640"/>
+                  </a:lnTo>
+                  <a:lnTo>
+                    <a:pt x="3925894" y="3194790"/>
+                  </a:lnTo>
+                  <a:lnTo>
+                    <a:pt x="3997516" y="3201768"/>
+                  </a:lnTo>
+                  <a:lnTo>
+                    <a:pt x="4069139" y="3208577"/>
+                  </a:lnTo>
+                  <a:lnTo>
+                    <a:pt x="4140761" y="3215221"/>
+                  </a:lnTo>
+                  <a:lnTo>
+                    <a:pt x="4212384" y="3221705"/>
+                  </a:lnTo>
+                  <a:lnTo>
+                    <a:pt x="4284006" y="3228033"/>
+                  </a:lnTo>
+                  <a:lnTo>
+                    <a:pt x="4355629" y="3234208"/>
+                  </a:lnTo>
+                  <a:lnTo>
+                    <a:pt x="4427251" y="3240234"/>
+                  </a:lnTo>
+                  <a:lnTo>
+                    <a:pt x="4498874" y="3246114"/>
+                  </a:lnTo>
+                  <a:lnTo>
+                    <a:pt x="4570496" y="3251852"/>
+                  </a:lnTo>
+                  <a:lnTo>
+                    <a:pt x="4642119" y="3257452"/>
+                  </a:lnTo>
+                  <a:lnTo>
+                    <a:pt x="4713742" y="3262916"/>
+                  </a:lnTo>
+                  <a:lnTo>
+                    <a:pt x="4785364" y="3268249"/>
+                  </a:lnTo>
+                  <a:lnTo>
+                    <a:pt x="4856987" y="3273452"/>
+                  </a:lnTo>
+                  <a:lnTo>
+                    <a:pt x="4928609" y="3278530"/>
                   </a:lnTo>
                 </a:path>
               </a:pathLst>
@@ -3787,309 +3781,309 @@
           </p:nvSpPr>
           <p:spPr>
             <a:xfrm>
-              <a:off x="1172049" y="3289307"/>
-              <a:ext cx="7090630" cy="2267092"/>
+              <a:off x="1172049" y="3249573"/>
+              <a:ext cx="7090630" cy="2306934"/>
             </a:xfrm>
             <a:custGeom>
               <a:avLst/>
               <a:pathLst>
-                <a:path w="7090630" h="2267092">
+                <a:path w="7090630" h="2306934">
                   <a:moveTo>
-                    <a:pt x="7090630" y="2267092"/>
+                    <a:pt x="7090630" y="2306934"/>
                   </a:moveTo>
                   <a:lnTo>
-                    <a:pt x="7019007" y="2266983"/>
-                  </a:lnTo>
-                  <a:lnTo>
-                    <a:pt x="6947385" y="2266860"/>
-                  </a:lnTo>
-                  <a:lnTo>
-                    <a:pt x="6875762" y="2266722"/>
-                  </a:lnTo>
-                  <a:lnTo>
-                    <a:pt x="6804139" y="2266566"/>
-                  </a:lnTo>
-                  <a:lnTo>
-                    <a:pt x="6732517" y="2266391"/>
-                  </a:lnTo>
-                  <a:lnTo>
-                    <a:pt x="6660894" y="2266192"/>
-                  </a:lnTo>
-                  <a:lnTo>
-                    <a:pt x="6589272" y="2265969"/>
-                  </a:lnTo>
-                  <a:lnTo>
-                    <a:pt x="6517649" y="2265716"/>
-                  </a:lnTo>
-                  <a:lnTo>
-                    <a:pt x="6446027" y="2265432"/>
-                  </a:lnTo>
-                  <a:lnTo>
-                    <a:pt x="6374404" y="2265111"/>
-                  </a:lnTo>
-                  <a:lnTo>
-                    <a:pt x="6302782" y="2264749"/>
-                  </a:lnTo>
-                  <a:lnTo>
-                    <a:pt x="6231159" y="2264341"/>
-                  </a:lnTo>
-                  <a:lnTo>
-                    <a:pt x="6159537" y="2263881"/>
-                  </a:lnTo>
-                  <a:lnTo>
-                    <a:pt x="6087914" y="2263362"/>
-                  </a:lnTo>
-                  <a:lnTo>
-                    <a:pt x="6016292" y="2262776"/>
-                  </a:lnTo>
-                  <a:lnTo>
-                    <a:pt x="5944669" y="2262116"/>
-                  </a:lnTo>
-                  <a:lnTo>
-                    <a:pt x="5873047" y="2261371"/>
-                  </a:lnTo>
-                  <a:lnTo>
-                    <a:pt x="5801424" y="2260531"/>
-                  </a:lnTo>
-                  <a:lnTo>
-                    <a:pt x="5729802" y="2259584"/>
-                  </a:lnTo>
-                  <a:lnTo>
-                    <a:pt x="5658179" y="2258515"/>
-                  </a:lnTo>
-                  <a:lnTo>
-                    <a:pt x="5586557" y="2257310"/>
-                  </a:lnTo>
-                  <a:lnTo>
-                    <a:pt x="5514934" y="2255951"/>
-                  </a:lnTo>
-                  <a:lnTo>
-                    <a:pt x="5443311" y="2254418"/>
-                  </a:lnTo>
-                  <a:lnTo>
-                    <a:pt x="5371689" y="2252689"/>
-                  </a:lnTo>
-                  <a:lnTo>
-                    <a:pt x="5300066" y="2250739"/>
-                  </a:lnTo>
-                  <a:lnTo>
-                    <a:pt x="5228444" y="2248539"/>
-                  </a:lnTo>
-                  <a:lnTo>
-                    <a:pt x="5156821" y="2246059"/>
-                  </a:lnTo>
-                  <a:lnTo>
-                    <a:pt x="5085199" y="2243261"/>
-                  </a:lnTo>
-                  <a:lnTo>
-                    <a:pt x="5013576" y="2240106"/>
-                  </a:lnTo>
-                  <a:lnTo>
-                    <a:pt x="4941954" y="2236547"/>
-                  </a:lnTo>
-                  <a:lnTo>
-                    <a:pt x="4870331" y="2232533"/>
-                  </a:lnTo>
-                  <a:lnTo>
-                    <a:pt x="4798709" y="2228006"/>
-                  </a:lnTo>
-                  <a:lnTo>
-                    <a:pt x="4727086" y="2222900"/>
-                  </a:lnTo>
-                  <a:lnTo>
-                    <a:pt x="4655464" y="2217142"/>
-                  </a:lnTo>
-                  <a:lnTo>
-                    <a:pt x="4583841" y="2210647"/>
-                  </a:lnTo>
-                  <a:lnTo>
-                    <a:pt x="4512219" y="2203322"/>
-                  </a:lnTo>
-                  <a:lnTo>
-                    <a:pt x="4440596" y="2195060"/>
-                  </a:lnTo>
-                  <a:lnTo>
-                    <a:pt x="4368974" y="2185742"/>
-                  </a:lnTo>
-                  <a:lnTo>
-                    <a:pt x="4297351" y="2175233"/>
-                  </a:lnTo>
-                  <a:lnTo>
-                    <a:pt x="4225729" y="2163381"/>
-                  </a:lnTo>
-                  <a:lnTo>
-                    <a:pt x="4154106" y="2150013"/>
-                  </a:lnTo>
-                  <a:lnTo>
-                    <a:pt x="4082483" y="2134935"/>
-                  </a:lnTo>
-                  <a:lnTo>
-                    <a:pt x="4010861" y="2117931"/>
-                  </a:lnTo>
-                  <a:lnTo>
-                    <a:pt x="3939238" y="2098752"/>
-                  </a:lnTo>
-                  <a:lnTo>
-                    <a:pt x="3867616" y="2077121"/>
-                  </a:lnTo>
-                  <a:lnTo>
-                    <a:pt x="3795993" y="2052725"/>
-                  </a:lnTo>
-                  <a:lnTo>
-                    <a:pt x="3724371" y="2025209"/>
-                  </a:lnTo>
-                  <a:lnTo>
-                    <a:pt x="3652748" y="1994176"/>
-                  </a:lnTo>
-                  <a:lnTo>
-                    <a:pt x="3581126" y="1959175"/>
-                  </a:lnTo>
-                  <a:lnTo>
-                    <a:pt x="3509503" y="1919700"/>
-                  </a:lnTo>
-                  <a:lnTo>
-                    <a:pt x="3437881" y="1875177"/>
-                  </a:lnTo>
-                  <a:lnTo>
-                    <a:pt x="3366258" y="1824962"/>
-                  </a:lnTo>
-                  <a:lnTo>
-                    <a:pt x="3294636" y="1768327"/>
-                  </a:lnTo>
-                  <a:lnTo>
-                    <a:pt x="3223013" y="1704452"/>
-                  </a:lnTo>
-                  <a:lnTo>
-                    <a:pt x="3151391" y="1632410"/>
-                  </a:lnTo>
-                  <a:lnTo>
-                    <a:pt x="3079768" y="1551157"/>
-                  </a:lnTo>
-                  <a:lnTo>
-                    <a:pt x="3008146" y="1459517"/>
-                  </a:lnTo>
-                  <a:lnTo>
-                    <a:pt x="2936523" y="1422626"/>
-                  </a:lnTo>
-                  <a:lnTo>
-                    <a:pt x="2864901" y="1402031"/>
-                  </a:lnTo>
-                  <a:lnTo>
-                    <a:pt x="2793278" y="1380935"/>
-                  </a:lnTo>
-                  <a:lnTo>
-                    <a:pt x="2721655" y="1359324"/>
-                  </a:lnTo>
-                  <a:lnTo>
-                    <a:pt x="2650033" y="1337188"/>
-                  </a:lnTo>
-                  <a:lnTo>
-                    <a:pt x="2578410" y="1314511"/>
-                  </a:lnTo>
-                  <a:lnTo>
-                    <a:pt x="2506788" y="1291283"/>
-                  </a:lnTo>
-                  <a:lnTo>
-                    <a:pt x="2435165" y="1267488"/>
-                  </a:lnTo>
-                  <a:lnTo>
-                    <a:pt x="2363543" y="1243114"/>
-                  </a:lnTo>
-                  <a:lnTo>
-                    <a:pt x="2291920" y="1218146"/>
-                  </a:lnTo>
-                  <a:lnTo>
-                    <a:pt x="2220298" y="1192570"/>
-                  </a:lnTo>
-                  <a:lnTo>
-                    <a:pt x="2148675" y="1166370"/>
-                  </a:lnTo>
-                  <a:lnTo>
-                    <a:pt x="2077053" y="1139532"/>
-                  </a:lnTo>
-                  <a:lnTo>
-                    <a:pt x="2005430" y="1112041"/>
-                  </a:lnTo>
-                  <a:lnTo>
-                    <a:pt x="1933808" y="1083879"/>
-                  </a:lnTo>
-                  <a:lnTo>
-                    <a:pt x="1862185" y="1055031"/>
-                  </a:lnTo>
-                  <a:lnTo>
-                    <a:pt x="1790563" y="1025481"/>
-                  </a:lnTo>
-                  <a:lnTo>
-                    <a:pt x="1718940" y="995211"/>
-                  </a:lnTo>
-                  <a:lnTo>
-                    <a:pt x="1647318" y="964203"/>
-                  </a:lnTo>
-                  <a:lnTo>
-                    <a:pt x="1575695" y="932440"/>
-                  </a:lnTo>
-                  <a:lnTo>
-                    <a:pt x="1504073" y="899903"/>
-                  </a:lnTo>
-                  <a:lnTo>
-                    <a:pt x="1432450" y="866573"/>
-                  </a:lnTo>
-                  <a:lnTo>
-                    <a:pt x="1360827" y="832431"/>
-                  </a:lnTo>
-                  <a:lnTo>
-                    <a:pt x="1289205" y="797457"/>
-                  </a:lnTo>
-                  <a:lnTo>
-                    <a:pt x="1217582" y="761631"/>
-                  </a:lnTo>
-                  <a:lnTo>
-                    <a:pt x="1145960" y="724933"/>
-                  </a:lnTo>
-                  <a:lnTo>
-                    <a:pt x="1074337" y="687340"/>
-                  </a:lnTo>
-                  <a:lnTo>
-                    <a:pt x="1002715" y="648832"/>
-                  </a:lnTo>
-                  <a:lnTo>
-                    <a:pt x="931092" y="609385"/>
-                  </a:lnTo>
-                  <a:lnTo>
-                    <a:pt x="859470" y="568977"/>
-                  </a:lnTo>
-                  <a:lnTo>
-                    <a:pt x="787847" y="527585"/>
-                  </a:lnTo>
-                  <a:lnTo>
-                    <a:pt x="716225" y="485184"/>
-                  </a:lnTo>
-                  <a:lnTo>
-                    <a:pt x="644602" y="441751"/>
-                  </a:lnTo>
-                  <a:lnTo>
-                    <a:pt x="572980" y="397259"/>
-                  </a:lnTo>
-                  <a:lnTo>
-                    <a:pt x="501357" y="351683"/>
-                  </a:lnTo>
-                  <a:lnTo>
-                    <a:pt x="429735" y="304997"/>
-                  </a:lnTo>
-                  <a:lnTo>
-                    <a:pt x="358112" y="257173"/>
-                  </a:lnTo>
-                  <a:lnTo>
-                    <a:pt x="286490" y="208184"/>
-                  </a:lnTo>
-                  <a:lnTo>
-                    <a:pt x="214867" y="158002"/>
-                  </a:lnTo>
-                  <a:lnTo>
-                    <a:pt x="143245" y="106597"/>
-                  </a:lnTo>
-                  <a:lnTo>
-                    <a:pt x="71622" y="53940"/>
+                    <a:pt x="7019007" y="2306837"/>
+                  </a:lnTo>
+                  <a:lnTo>
+                    <a:pt x="6947385" y="2306727"/>
+                  </a:lnTo>
+                  <a:lnTo>
+                    <a:pt x="6875762" y="2306603"/>
+                  </a:lnTo>
+                  <a:lnTo>
+                    <a:pt x="6804139" y="2306463"/>
+                  </a:lnTo>
+                  <a:lnTo>
+                    <a:pt x="6732517" y="2306304"/>
+                  </a:lnTo>
+                  <a:lnTo>
+                    <a:pt x="6660894" y="2306125"/>
+                  </a:lnTo>
+                  <a:lnTo>
+                    <a:pt x="6589272" y="2305922"/>
+                  </a:lnTo>
+                  <a:lnTo>
+                    <a:pt x="6517649" y="2305693"/>
+                  </a:lnTo>
+                  <a:lnTo>
+                    <a:pt x="6446027" y="2305434"/>
+                  </a:lnTo>
+                  <a:lnTo>
+                    <a:pt x="6374404" y="2305141"/>
+                  </a:lnTo>
+                  <a:lnTo>
+                    <a:pt x="6302782" y="2304810"/>
+                  </a:lnTo>
+                  <a:lnTo>
+                    <a:pt x="6231159" y="2304435"/>
+                  </a:lnTo>
+                  <a:lnTo>
+                    <a:pt x="6159537" y="2304011"/>
+                  </a:lnTo>
+                  <a:lnTo>
+                    <a:pt x="6087914" y="2303532"/>
+                  </a:lnTo>
+                  <a:lnTo>
+                    <a:pt x="6016292" y="2302991"/>
+                  </a:lnTo>
+                  <a:lnTo>
+                    <a:pt x="5944669" y="2302378"/>
+                  </a:lnTo>
+                  <a:lnTo>
+                    <a:pt x="5873047" y="2301686"/>
+                  </a:lnTo>
+                  <a:lnTo>
+                    <a:pt x="5801424" y="2300903"/>
+                  </a:lnTo>
+                  <a:lnTo>
+                    <a:pt x="5729802" y="2300018"/>
+                  </a:lnTo>
+                  <a:lnTo>
+                    <a:pt x="5658179" y="2299017"/>
+                  </a:lnTo>
+                  <a:lnTo>
+                    <a:pt x="5586557" y="2297885"/>
+                  </a:lnTo>
+                  <a:lnTo>
+                    <a:pt x="5514934" y="2296606"/>
+                  </a:lnTo>
+                  <a:lnTo>
+                    <a:pt x="5443311" y="2295159"/>
+                  </a:lnTo>
+                  <a:lnTo>
+                    <a:pt x="5371689" y="2293523"/>
+                  </a:lnTo>
+                  <a:lnTo>
+                    <a:pt x="5300066" y="2291673"/>
+                  </a:lnTo>
+                  <a:lnTo>
+                    <a:pt x="5228444" y="2289581"/>
+                  </a:lnTo>
+                  <a:lnTo>
+                    <a:pt x="5156821" y="2287216"/>
+                  </a:lnTo>
+                  <a:lnTo>
+                    <a:pt x="5085199" y="2284542"/>
+                  </a:lnTo>
+                  <a:lnTo>
+                    <a:pt x="5013576" y="2281518"/>
+                  </a:lnTo>
+                  <a:lnTo>
+                    <a:pt x="4941954" y="2278100"/>
+                  </a:lnTo>
+                  <a:lnTo>
+                    <a:pt x="4870331" y="2274234"/>
+                  </a:lnTo>
+                  <a:lnTo>
+                    <a:pt x="4798709" y="2269863"/>
+                  </a:lnTo>
+                  <a:lnTo>
+                    <a:pt x="4727086" y="2264921"/>
+                  </a:lnTo>
+                  <a:lnTo>
+                    <a:pt x="4655464" y="2259333"/>
+                  </a:lnTo>
+                  <a:lnTo>
+                    <a:pt x="4583841" y="2253014"/>
+                  </a:lnTo>
+                  <a:lnTo>
+                    <a:pt x="4512219" y="2245870"/>
+                  </a:lnTo>
+                  <a:lnTo>
+                    <a:pt x="4440596" y="2237792"/>
+                  </a:lnTo>
+                  <a:lnTo>
+                    <a:pt x="4368974" y="2228658"/>
+                  </a:lnTo>
+                  <a:lnTo>
+                    <a:pt x="4297351" y="2218330"/>
+                  </a:lnTo>
+                  <a:lnTo>
+                    <a:pt x="4225729" y="2206653"/>
+                  </a:lnTo>
+                  <a:lnTo>
+                    <a:pt x="4154106" y="2193449"/>
+                  </a:lnTo>
+                  <a:lnTo>
+                    <a:pt x="4082483" y="2178519"/>
+                  </a:lnTo>
+                  <a:lnTo>
+                    <a:pt x="4010861" y="2161638"/>
+                  </a:lnTo>
+                  <a:lnTo>
+                    <a:pt x="3939238" y="2142551"/>
+                  </a:lnTo>
+                  <a:lnTo>
+                    <a:pt x="3867616" y="2120969"/>
+                  </a:lnTo>
+                  <a:lnTo>
+                    <a:pt x="3795993" y="2096567"/>
+                  </a:lnTo>
+                  <a:lnTo>
+                    <a:pt x="3724371" y="2068975"/>
+                  </a:lnTo>
+                  <a:lnTo>
+                    <a:pt x="3652748" y="2037776"/>
+                  </a:lnTo>
+                  <a:lnTo>
+                    <a:pt x="3581126" y="2002500"/>
+                  </a:lnTo>
+                  <a:lnTo>
+                    <a:pt x="3509503" y="1962614"/>
+                  </a:lnTo>
+                  <a:lnTo>
+                    <a:pt x="3437881" y="1917514"/>
+                  </a:lnTo>
+                  <a:lnTo>
+                    <a:pt x="3366258" y="1866519"/>
+                  </a:lnTo>
+                  <a:lnTo>
+                    <a:pt x="3294636" y="1808860"/>
+                  </a:lnTo>
+                  <a:lnTo>
+                    <a:pt x="3223013" y="1743664"/>
+                  </a:lnTo>
+                  <a:lnTo>
+                    <a:pt x="3151391" y="1669948"/>
+                  </a:lnTo>
+                  <a:lnTo>
+                    <a:pt x="3079768" y="1586596"/>
+                  </a:lnTo>
+                  <a:lnTo>
+                    <a:pt x="3008146" y="1492351"/>
+                  </a:lnTo>
+                  <a:lnTo>
+                    <a:pt x="2936523" y="1460590"/>
+                  </a:lnTo>
+                  <a:lnTo>
+                    <a:pt x="2864901" y="1439629"/>
+                  </a:lnTo>
+                  <a:lnTo>
+                    <a:pt x="2793278" y="1418149"/>
+                  </a:lnTo>
+                  <a:lnTo>
+                    <a:pt x="2721655" y="1396138"/>
+                  </a:lnTo>
+                  <a:lnTo>
+                    <a:pt x="2650033" y="1373582"/>
+                  </a:lnTo>
+                  <a:lnTo>
+                    <a:pt x="2578410" y="1350468"/>
+                  </a:lnTo>
+                  <a:lnTo>
+                    <a:pt x="2506788" y="1326782"/>
+                  </a:lnTo>
+                  <a:lnTo>
+                    <a:pt x="2435165" y="1302510"/>
+                  </a:lnTo>
+                  <a:lnTo>
+                    <a:pt x="2363543" y="1277637"/>
+                  </a:lnTo>
+                  <a:lnTo>
+                    <a:pt x="2291920" y="1252149"/>
+                  </a:lnTo>
+                  <a:lnTo>
+                    <a:pt x="2220298" y="1226030"/>
+                  </a:lnTo>
+                  <a:lnTo>
+                    <a:pt x="2148675" y="1199264"/>
+                  </a:lnTo>
+                  <a:lnTo>
+                    <a:pt x="2077053" y="1171837"/>
+                  </a:lnTo>
+                  <a:lnTo>
+                    <a:pt x="2005430" y="1143730"/>
+                  </a:lnTo>
+                  <a:lnTo>
+                    <a:pt x="1933808" y="1114929"/>
+                  </a:lnTo>
+                  <a:lnTo>
+                    <a:pt x="1862185" y="1085414"/>
+                  </a:lnTo>
+                  <a:lnTo>
+                    <a:pt x="1790563" y="1055169"/>
+                  </a:lnTo>
+                  <a:lnTo>
+                    <a:pt x="1718940" y="1024176"/>
+                  </a:lnTo>
+                  <a:lnTo>
+                    <a:pt x="1647318" y="992416"/>
+                  </a:lnTo>
+                  <a:lnTo>
+                    <a:pt x="1575695" y="959870"/>
+                  </a:lnTo>
+                  <a:lnTo>
+                    <a:pt x="1504073" y="926518"/>
+                  </a:lnTo>
+                  <a:lnTo>
+                    <a:pt x="1432450" y="892342"/>
+                  </a:lnTo>
+                  <a:lnTo>
+                    <a:pt x="1360827" y="857319"/>
+                  </a:lnTo>
+                  <a:lnTo>
+                    <a:pt x="1289205" y="821430"/>
+                  </a:lnTo>
+                  <a:lnTo>
+                    <a:pt x="1217582" y="784653"/>
+                  </a:lnTo>
+                  <a:lnTo>
+                    <a:pt x="1145960" y="746966"/>
+                  </a:lnTo>
+                  <a:lnTo>
+                    <a:pt x="1074337" y="708346"/>
+                  </a:lnTo>
+                  <a:lnTo>
+                    <a:pt x="1002715" y="668771"/>
+                  </a:lnTo>
+                  <a:lnTo>
+                    <a:pt x="931092" y="628216"/>
+                  </a:lnTo>
+                  <a:lnTo>
+                    <a:pt x="859470" y="586658"/>
+                  </a:lnTo>
+                  <a:lnTo>
+                    <a:pt x="787847" y="544072"/>
+                  </a:lnTo>
+                  <a:lnTo>
+                    <a:pt x="716225" y="500431"/>
+                  </a:lnTo>
+                  <a:lnTo>
+                    <a:pt x="644602" y="455711"/>
+                  </a:lnTo>
+                  <a:lnTo>
+                    <a:pt x="572980" y="409884"/>
+                  </a:lnTo>
+                  <a:lnTo>
+                    <a:pt x="501357" y="362923"/>
+                  </a:lnTo>
+                  <a:lnTo>
+                    <a:pt x="429735" y="314801"/>
+                  </a:lnTo>
+                  <a:lnTo>
+                    <a:pt x="358112" y="265487"/>
+                  </a:lnTo>
+                  <a:lnTo>
+                    <a:pt x="286490" y="214953"/>
+                  </a:lnTo>
+                  <a:lnTo>
+                    <a:pt x="214867" y="163169"/>
+                  </a:lnTo>
+                  <a:lnTo>
+                    <a:pt x="143245" y="110103"/>
+                  </a:lnTo>
+                  <a:lnTo>
+                    <a:pt x="71622" y="55724"/>
                   </a:lnTo>
                   <a:lnTo>
                     <a:pt x="0" y="0"/>
@@ -4112,249 +4106,246 @@
           </p:nvSpPr>
           <p:spPr>
             <a:xfrm>
-              <a:off x="2741351" y="2073503"/>
-              <a:ext cx="5521327" cy="3470411"/>
+              <a:off x="2775032" y="2073503"/>
+              <a:ext cx="5487646" cy="3471405"/>
             </a:xfrm>
             <a:custGeom>
               <a:avLst/>
               <a:pathLst>
-                <a:path w="5521327" h="3470411">
+                <a:path w="5487646" h="3471405">
                   <a:moveTo>
                     <a:pt x="0" y="0"/>
                   </a:moveTo>
                   <a:lnTo>
-                    <a:pt x="6393" y="23125"/>
-                  </a:lnTo>
-                  <a:lnTo>
-                    <a:pt x="78015" y="264149"/>
-                  </a:lnTo>
-                  <a:lnTo>
-                    <a:pt x="149638" y="488387"/>
-                  </a:lnTo>
-                  <a:lnTo>
-                    <a:pt x="221260" y="697007"/>
-                  </a:lnTo>
-                  <a:lnTo>
-                    <a:pt x="292883" y="891097"/>
-                  </a:lnTo>
-                  <a:lnTo>
-                    <a:pt x="364505" y="1071670"/>
-                  </a:lnTo>
-                  <a:lnTo>
-                    <a:pt x="436128" y="1239665"/>
-                  </a:lnTo>
-                  <a:lnTo>
-                    <a:pt x="507750" y="1395961"/>
-                  </a:lnTo>
-                  <a:lnTo>
-                    <a:pt x="579373" y="1541370"/>
-                  </a:lnTo>
-                  <a:lnTo>
-                    <a:pt x="650996" y="1676652"/>
-                  </a:lnTo>
-                  <a:lnTo>
-                    <a:pt x="722618" y="1802512"/>
-                  </a:lnTo>
-                  <a:lnTo>
-                    <a:pt x="794241" y="1919607"/>
-                  </a:lnTo>
-                  <a:lnTo>
-                    <a:pt x="865863" y="2028545"/>
-                  </a:lnTo>
-                  <a:lnTo>
-                    <a:pt x="937486" y="2129897"/>
-                  </a:lnTo>
-                  <a:lnTo>
-                    <a:pt x="1009108" y="2224189"/>
-                  </a:lnTo>
-                  <a:lnTo>
-                    <a:pt x="1080731" y="2311915"/>
-                  </a:lnTo>
-                  <a:lnTo>
-                    <a:pt x="1152353" y="2393530"/>
-                  </a:lnTo>
-                  <a:lnTo>
-                    <a:pt x="1223976" y="2469461"/>
-                  </a:lnTo>
-                  <a:lnTo>
-                    <a:pt x="1295598" y="2540104"/>
-                  </a:lnTo>
-                  <a:lnTo>
-                    <a:pt x="1367221" y="2605827"/>
-                  </a:lnTo>
-                  <a:lnTo>
-                    <a:pt x="1438843" y="2666972"/>
-                  </a:lnTo>
-                  <a:lnTo>
-                    <a:pt x="1510466" y="2723858"/>
-                  </a:lnTo>
-                  <a:lnTo>
-                    <a:pt x="1582088" y="2776783"/>
-                  </a:lnTo>
-                  <a:lnTo>
-                    <a:pt x="1653711" y="2826021"/>
-                  </a:lnTo>
-                  <a:lnTo>
-                    <a:pt x="1725333" y="2871830"/>
-                  </a:lnTo>
-                  <a:lnTo>
-                    <a:pt x="1796956" y="2914449"/>
-                  </a:lnTo>
-                  <a:lnTo>
-                    <a:pt x="1868578" y="2954099"/>
-                  </a:lnTo>
-                  <a:lnTo>
-                    <a:pt x="1940201" y="2990988"/>
-                  </a:lnTo>
-                  <a:lnTo>
-                    <a:pt x="2011824" y="3025307"/>
-                  </a:lnTo>
-                  <a:lnTo>
-                    <a:pt x="2083446" y="3057237"/>
-                  </a:lnTo>
-                  <a:lnTo>
-                    <a:pt x="2155069" y="3086942"/>
-                  </a:lnTo>
-                  <a:lnTo>
-                    <a:pt x="2226691" y="3114579"/>
-                  </a:lnTo>
-                  <a:lnTo>
-                    <a:pt x="2298314" y="3140290"/>
-                  </a:lnTo>
-                  <a:lnTo>
-                    <a:pt x="2369936" y="3164211"/>
-                  </a:lnTo>
-                  <a:lnTo>
-                    <a:pt x="2441559" y="3186466"/>
-                  </a:lnTo>
-                  <a:lnTo>
-                    <a:pt x="2513181" y="3207171"/>
-                  </a:lnTo>
-                  <a:lnTo>
-                    <a:pt x="2584804" y="3226434"/>
-                  </a:lnTo>
-                  <a:lnTo>
-                    <a:pt x="2656426" y="3244355"/>
-                  </a:lnTo>
-                  <a:lnTo>
-                    <a:pt x="2728049" y="3261028"/>
-                  </a:lnTo>
-                  <a:lnTo>
-                    <a:pt x="2799671" y="3276540"/>
-                  </a:lnTo>
-                  <a:lnTo>
-                    <a:pt x="2871294" y="3290972"/>
-                  </a:lnTo>
-                  <a:lnTo>
-                    <a:pt x="2942916" y="3304398"/>
-                  </a:lnTo>
-                  <a:lnTo>
-                    <a:pt x="3014539" y="3316889"/>
-                  </a:lnTo>
-                  <a:lnTo>
-                    <a:pt x="3086161" y="3328510"/>
-                  </a:lnTo>
-                  <a:lnTo>
-                    <a:pt x="3157784" y="3339322"/>
-                  </a:lnTo>
-                  <a:lnTo>
-                    <a:pt x="3229406" y="3349381"/>
-                  </a:lnTo>
-                  <a:lnTo>
-                    <a:pt x="3301029" y="3358739"/>
-                  </a:lnTo>
-                  <a:lnTo>
-                    <a:pt x="3372652" y="3367446"/>
-                  </a:lnTo>
-                  <a:lnTo>
-                    <a:pt x="3444274" y="3375546"/>
-                  </a:lnTo>
-                  <a:lnTo>
-                    <a:pt x="3515897" y="3383082"/>
-                  </a:lnTo>
-                  <a:lnTo>
-                    <a:pt x="3587519" y="3390093"/>
-                  </a:lnTo>
-                  <a:lnTo>
-                    <a:pt x="3659142" y="3396616"/>
-                  </a:lnTo>
-                  <a:lnTo>
-                    <a:pt x="3730764" y="3402684"/>
-                  </a:lnTo>
-                  <a:lnTo>
-                    <a:pt x="3802387" y="3408330"/>
-                  </a:lnTo>
-                  <a:lnTo>
-                    <a:pt x="3874009" y="3413582"/>
-                  </a:lnTo>
-                  <a:lnTo>
-                    <a:pt x="3945632" y="3418469"/>
-                  </a:lnTo>
-                  <a:lnTo>
-                    <a:pt x="4017254" y="3423016"/>
-                  </a:lnTo>
-                  <a:lnTo>
-                    <a:pt x="4088877" y="3427245"/>
-                  </a:lnTo>
-                  <a:lnTo>
-                    <a:pt x="4160499" y="3431181"/>
-                  </a:lnTo>
-                  <a:lnTo>
-                    <a:pt x="4232122" y="3434842"/>
-                  </a:lnTo>
-                  <a:lnTo>
-                    <a:pt x="4303744" y="3438248"/>
-                  </a:lnTo>
-                  <a:lnTo>
-                    <a:pt x="4375367" y="3441417"/>
-                  </a:lnTo>
-                  <a:lnTo>
-                    <a:pt x="4446989" y="3444365"/>
-                  </a:lnTo>
-                  <a:lnTo>
-                    <a:pt x="4518612" y="3447108"/>
-                  </a:lnTo>
-                  <a:lnTo>
-                    <a:pt x="4590234" y="3449659"/>
-                  </a:lnTo>
-                  <a:lnTo>
-                    <a:pt x="4661857" y="3452034"/>
-                  </a:lnTo>
-                  <a:lnTo>
-                    <a:pt x="4733480" y="3454242"/>
-                  </a:lnTo>
-                  <a:lnTo>
-                    <a:pt x="4805102" y="3456297"/>
-                  </a:lnTo>
-                  <a:lnTo>
-                    <a:pt x="4876725" y="3458209"/>
-                  </a:lnTo>
-                  <a:lnTo>
-                    <a:pt x="4948347" y="3459988"/>
-                  </a:lnTo>
-                  <a:lnTo>
-                    <a:pt x="5019970" y="3461642"/>
-                  </a:lnTo>
-                  <a:lnTo>
-                    <a:pt x="5091592" y="3463182"/>
-                  </a:lnTo>
-                  <a:lnTo>
-                    <a:pt x="5163215" y="3464614"/>
-                  </a:lnTo>
-                  <a:lnTo>
-                    <a:pt x="5234837" y="3465947"/>
-                  </a:lnTo>
-                  <a:lnTo>
-                    <a:pt x="5306460" y="3467186"/>
-                  </a:lnTo>
-                  <a:lnTo>
-                    <a:pt x="5378082" y="3468340"/>
-                  </a:lnTo>
-                  <a:lnTo>
-                    <a:pt x="5449705" y="3469413"/>
-                  </a:lnTo>
-                  <a:lnTo>
-                    <a:pt x="5521327" y="3470411"/>
+                    <a:pt x="44334" y="157353"/>
+                  </a:lnTo>
+                  <a:lnTo>
+                    <a:pt x="115957" y="393509"/>
+                  </a:lnTo>
+                  <a:lnTo>
+                    <a:pt x="187580" y="612898"/>
+                  </a:lnTo>
+                  <a:lnTo>
+                    <a:pt x="259202" y="816713"/>
+                  </a:lnTo>
+                  <a:lnTo>
+                    <a:pt x="330825" y="1006057"/>
+                  </a:lnTo>
+                  <a:lnTo>
+                    <a:pt x="402447" y="1181960"/>
+                  </a:lnTo>
+                  <a:lnTo>
+                    <a:pt x="474070" y="1345374"/>
+                  </a:lnTo>
+                  <a:lnTo>
+                    <a:pt x="545692" y="1497186"/>
+                  </a:lnTo>
+                  <a:lnTo>
+                    <a:pt x="617315" y="1638221"/>
+                  </a:lnTo>
+                  <a:lnTo>
+                    <a:pt x="688937" y="1769243"/>
+                  </a:lnTo>
+                  <a:lnTo>
+                    <a:pt x="760560" y="1890964"/>
+                  </a:lnTo>
+                  <a:lnTo>
+                    <a:pt x="832182" y="2004042"/>
+                  </a:lnTo>
+                  <a:lnTo>
+                    <a:pt x="903805" y="2109093"/>
+                  </a:lnTo>
+                  <a:lnTo>
+                    <a:pt x="975427" y="2206686"/>
+                  </a:lnTo>
+                  <a:lnTo>
+                    <a:pt x="1047050" y="2297350"/>
+                  </a:lnTo>
+                  <a:lnTo>
+                    <a:pt x="1118672" y="2381578"/>
+                  </a:lnTo>
+                  <a:lnTo>
+                    <a:pt x="1190295" y="2459826"/>
+                  </a:lnTo>
+                  <a:lnTo>
+                    <a:pt x="1261917" y="2532518"/>
+                  </a:lnTo>
+                  <a:lnTo>
+                    <a:pt x="1333540" y="2600050"/>
+                  </a:lnTo>
+                  <a:lnTo>
+                    <a:pt x="1405162" y="2662788"/>
+                  </a:lnTo>
+                  <a:lnTo>
+                    <a:pt x="1476785" y="2721071"/>
+                  </a:lnTo>
+                  <a:lnTo>
+                    <a:pt x="1548408" y="2775217"/>
+                  </a:lnTo>
+                  <a:lnTo>
+                    <a:pt x="1620030" y="2825519"/>
+                  </a:lnTo>
+                  <a:lnTo>
+                    <a:pt x="1691653" y="2872249"/>
+                  </a:lnTo>
+                  <a:lnTo>
+                    <a:pt x="1763275" y="2915662"/>
+                  </a:lnTo>
+                  <a:lnTo>
+                    <a:pt x="1834898" y="2955993"/>
+                  </a:lnTo>
+                  <a:lnTo>
+                    <a:pt x="1906520" y="2993461"/>
+                  </a:lnTo>
+                  <a:lnTo>
+                    <a:pt x="1978143" y="3028268"/>
+                  </a:lnTo>
+                  <a:lnTo>
+                    <a:pt x="2049765" y="3060605"/>
+                  </a:lnTo>
+                  <a:lnTo>
+                    <a:pt x="2121388" y="3090645"/>
+                  </a:lnTo>
+                  <a:lnTo>
+                    <a:pt x="2193010" y="3118553"/>
+                  </a:lnTo>
+                  <a:lnTo>
+                    <a:pt x="2264633" y="3144480"/>
+                  </a:lnTo>
+                  <a:lnTo>
+                    <a:pt x="2336255" y="3168566"/>
+                  </a:lnTo>
+                  <a:lnTo>
+                    <a:pt x="2407878" y="3190942"/>
+                  </a:lnTo>
+                  <a:lnTo>
+                    <a:pt x="2479500" y="3211730"/>
+                  </a:lnTo>
+                  <a:lnTo>
+                    <a:pt x="2551123" y="3231041"/>
+                  </a:lnTo>
+                  <a:lnTo>
+                    <a:pt x="2622745" y="3248982"/>
+                  </a:lnTo>
+                  <a:lnTo>
+                    <a:pt x="2694368" y="3265649"/>
+                  </a:lnTo>
+                  <a:lnTo>
+                    <a:pt x="2765990" y="3281133"/>
+                  </a:lnTo>
+                  <a:lnTo>
+                    <a:pt x="2837613" y="3295517"/>
+                  </a:lnTo>
+                  <a:lnTo>
+                    <a:pt x="2909236" y="3308880"/>
+                  </a:lnTo>
+                  <a:lnTo>
+                    <a:pt x="2980858" y="3321295"/>
+                  </a:lnTo>
+                  <a:lnTo>
+                    <a:pt x="3052481" y="3332828"/>
+                  </a:lnTo>
+                  <a:lnTo>
+                    <a:pt x="3124103" y="3343542"/>
+                  </a:lnTo>
+                  <a:lnTo>
+                    <a:pt x="3195726" y="3353496"/>
+                  </a:lnTo>
+                  <a:lnTo>
+                    <a:pt x="3267348" y="3362743"/>
+                  </a:lnTo>
+                  <a:lnTo>
+                    <a:pt x="3338971" y="3371334"/>
+                  </a:lnTo>
+                  <a:lnTo>
+                    <a:pt x="3410593" y="3379314"/>
+                  </a:lnTo>
+                  <a:lnTo>
+                    <a:pt x="3482216" y="3386729"/>
+                  </a:lnTo>
+                  <a:lnTo>
+                    <a:pt x="3553838" y="3393616"/>
+                  </a:lnTo>
+                  <a:lnTo>
+                    <a:pt x="3625461" y="3400015"/>
+                  </a:lnTo>
+                  <a:lnTo>
+                    <a:pt x="3697083" y="3405959"/>
+                  </a:lnTo>
+                  <a:lnTo>
+                    <a:pt x="3768706" y="3411482"/>
+                  </a:lnTo>
+                  <a:lnTo>
+                    <a:pt x="3840328" y="3416612"/>
+                  </a:lnTo>
+                  <a:lnTo>
+                    <a:pt x="3911951" y="3421378"/>
+                  </a:lnTo>
+                  <a:lnTo>
+                    <a:pt x="3983573" y="3425806"/>
+                  </a:lnTo>
+                  <a:lnTo>
+                    <a:pt x="4055196" y="3429920"/>
+                  </a:lnTo>
+                  <a:lnTo>
+                    <a:pt x="4126818" y="3433741"/>
+                  </a:lnTo>
+                  <a:lnTo>
+                    <a:pt x="4198441" y="3437291"/>
+                  </a:lnTo>
+                  <a:lnTo>
+                    <a:pt x="4270064" y="3440589"/>
+                  </a:lnTo>
+                  <a:lnTo>
+                    <a:pt x="4341686" y="3443653"/>
+                  </a:lnTo>
+                  <a:lnTo>
+                    <a:pt x="4413309" y="3446500"/>
+                  </a:lnTo>
+                  <a:lnTo>
+                    <a:pt x="4484931" y="3449144"/>
+                  </a:lnTo>
+                  <a:lnTo>
+                    <a:pt x="4556554" y="3451600"/>
+                  </a:lnTo>
+                  <a:lnTo>
+                    <a:pt x="4628176" y="3453883"/>
+                  </a:lnTo>
+                  <a:lnTo>
+                    <a:pt x="4699799" y="3456003"/>
+                  </a:lnTo>
+                  <a:lnTo>
+                    <a:pt x="4771421" y="3457972"/>
+                  </a:lnTo>
+                  <a:lnTo>
+                    <a:pt x="4843044" y="3459802"/>
+                  </a:lnTo>
+                  <a:lnTo>
+                    <a:pt x="4914666" y="3461502"/>
+                  </a:lnTo>
+                  <a:lnTo>
+                    <a:pt x="4986289" y="3463081"/>
+                  </a:lnTo>
+                  <a:lnTo>
+                    <a:pt x="5057911" y="3464548"/>
+                  </a:lnTo>
+                  <a:lnTo>
+                    <a:pt x="5129534" y="3465911"/>
+                  </a:lnTo>
+                  <a:lnTo>
+                    <a:pt x="5201156" y="3467178"/>
+                  </a:lnTo>
+                  <a:lnTo>
+                    <a:pt x="5272779" y="3468354"/>
+                  </a:lnTo>
+                  <a:lnTo>
+                    <a:pt x="5344401" y="3469447"/>
+                  </a:lnTo>
+                  <a:lnTo>
+                    <a:pt x="5416024" y="3470462"/>
+                  </a:lnTo>
+                  <a:lnTo>
+                    <a:pt x="5487646" y="3471405"/>
                   </a:lnTo>
                 </a:path>
               </a:pathLst>
@@ -4426,7 +4417,7 @@
           </p:nvSpPr>
           <p:spPr>
             <a:xfrm>
-              <a:off x="4164901" y="2073503"/>
+              <a:off x="4170171" y="2073503"/>
               <a:ext cx="0" cy="3649639"/>
             </a:xfrm>
             <a:custGeom>
@@ -4699,7 +4690,7 @@
           </p:nvSpPr>
           <p:spPr>
             <a:xfrm>
-              <a:off x="2284877" y="5785772"/>
+              <a:off x="2285456" y="5785772"/>
               <a:ext cx="161574" cy="80101"/>
             </a:xfrm>
             <a:prstGeom prst="rect">
@@ -4745,7 +4736,7 @@
           </p:nvSpPr>
           <p:spPr>
             <a:xfrm>
-              <a:off x="4138944" y="5785772"/>
+              <a:off x="4139043" y="5785772"/>
               <a:ext cx="62179" cy="80101"/>
             </a:xfrm>
             <a:prstGeom prst="rect">
@@ -4791,7 +4782,7 @@
           </p:nvSpPr>
           <p:spPr>
             <a:xfrm>
-              <a:off x="5912223" y="5785772"/>
+              <a:off x="5911843" y="5785772"/>
               <a:ext cx="124358" cy="80101"/>
             </a:xfrm>
             <a:prstGeom prst="rect">
@@ -4837,7 +4828,7 @@
           </p:nvSpPr>
           <p:spPr>
             <a:xfrm>
-              <a:off x="7716592" y="5785772"/>
+              <a:off x="7715733" y="5785772"/>
               <a:ext cx="124358" cy="80101"/>
             </a:xfrm>
             <a:prstGeom prst="rect">
@@ -5008,7 +4999,7 @@
                   <a:latin typeface="Helvetica"/>
                   <a:cs typeface="Helvetica"/>
                 </a:rPr>
-                <a:t>subHR per 10 % decline: 2.48 (1.35-4.55), p_Bonf = 0.020 (n = 6)  |  per IQR decline (Δ = 27.4 %): 12.13 (2.30-64.05)  |  IQR: [-12.6, 14.8] %</a:t>
+                <a:t>subHR per 10 % decline: 2.53 (1.36-4.70), p_Bonf = 0.020 (n = 6)  |  per IQR decline (Δ = 27.2 %): 12.48 (2.31-67.37)  |  IQR: [-12.3, 14.9] %</a:t>
               </a:r>
             </a:p>
           </p:txBody>
